--- a/slides/Clustering Performance vs Data Size.pptx
+++ b/slides/Clustering Performance vs Data Size.pptx
@@ -119,15 +119,6 @@
     </p:ext>
   </p:extLst>
 </p:presentation>
-</file>
-
-<file path=ppt/revisionInfo.xml><?xml version="1.0" encoding="utf-8"?>
-<p1510:revInfo xmlns:a="http://schemas.openxmlformats.org/drawingml/2006/main" xmlns:r="http://schemas.openxmlformats.org/officeDocument/2006/relationships" xmlns:p1510="http://schemas.microsoft.com/office/powerpoint/2015/10/main">
-  <p1510:revLst>
-    <p1510:client id="{188D5145-B281-4D86-9A47-181402986CD2}" v="55" dt="2026-04-27T08:24:01.834"/>
-    <p1510:client id="{5D8B49D0-EB3D-5BE7-CE8D-39FE5CCEA9F6}" v="23" dt="2026-04-27T12:28:48.955"/>
-  </p1510:revLst>
-</p1510:revInfo>
 </file>
 
 <file path=ppt/diagrams/colors1.xml><?xml version="1.0" encoding="utf-8"?>
@@ -10862,8 +10853,8 @@
         </p:blipFill>
         <p:spPr bwMode="auto">
           <a:xfrm>
-            <a:off x="6832879" y="113219"/>
-            <a:ext cx="5237279" cy="3003540"/>
+            <a:off x="6832880" y="460609"/>
+            <a:ext cx="4631534" cy="2656150"/>
           </a:xfrm>
           <a:prstGeom prst="rect">
             <a:avLst/>
@@ -10908,8 +10899,8 @@
         </p:blipFill>
         <p:spPr bwMode="auto">
           <a:xfrm>
-            <a:off x="6832879" y="3277626"/>
-            <a:ext cx="5237279" cy="3404528"/>
+            <a:off x="6832879" y="3657600"/>
+            <a:ext cx="4652753" cy="3024553"/>
           </a:xfrm>
           <a:prstGeom prst="rect">
             <a:avLst/>
@@ -10926,6 +10917,41 @@
           </a:extLst>
         </p:spPr>
       </p:pic>
+      <p:sp>
+        <p:nvSpPr>
+          <p:cNvPr id="3" name="TextBox 2">
+            <a:extLst>
+              <a:ext uri="{FF2B5EF4-FFF2-40B4-BE49-F238E27FC236}">
+                <a16:creationId xmlns:a16="http://schemas.microsoft.com/office/drawing/2014/main" id="{B8502EF4-C43E-7EB7-2E65-613615B0DF69}"/>
+              </a:ext>
+            </a:extLst>
+          </p:cNvPr>
+          <p:cNvSpPr txBox="1"/>
+          <p:nvPr/>
+        </p:nvSpPr>
+        <p:spPr>
+          <a:xfrm>
+            <a:off x="8744942" y="91277"/>
+            <a:ext cx="828625" cy="369332"/>
+          </a:xfrm>
+          <a:prstGeom prst="rect">
+            <a:avLst/>
+          </a:prstGeom>
+          <a:noFill/>
+        </p:spPr>
+        <p:txBody>
+          <a:bodyPr wrap="none" rtlCol="0">
+            <a:spAutoFit/>
+          </a:bodyPr>
+          <a:lstStyle/>
+          <a:p>
+            <a:r>
+              <a:rPr lang="en-US" dirty="0"/>
+              <a:t>Firefly</a:t>
+            </a:r>
+          </a:p>
+        </p:txBody>
+      </p:sp>
     </p:spTree>
     <p:extLst>
       <p:ext uri="{BB962C8B-B14F-4D97-AF65-F5344CB8AC3E}">
@@ -11823,7 +11849,12 @@
             <p:ph idx="1"/>
           </p:nvPr>
         </p:nvSpPr>
-        <p:spPr/>
+        <p:spPr>
+          <a:xfrm>
+            <a:off x="3421021" y="1944329"/>
+            <a:ext cx="5487005" cy="2969342"/>
+          </a:xfrm>
+        </p:spPr>
         <p:txBody>
           <a:bodyPr/>
           <a:lstStyle/>
